--- a/presentation/AB_Test_Results.pptx
+++ b/presentation/AB_Test_Results.pptx
@@ -10602,7 +10602,7 @@
 </p:sld>
 </file>
 
-<file path=ppt/slides/slide3.xml><?xml version="1.0" encoding="utf-8"?>
+<file path=ppt/slides/slide2.xml><?xml version="1.0" encoding="utf-8"?>
 <p:sld xmlns:a="http://schemas.openxmlformats.org/drawingml/2006/main" xmlns:r="http://schemas.openxmlformats.org/officeDocument/2006/relationships" xmlns:mc="http://schemas.openxmlformats.org/markup-compatibility/2006" xmlns:mv="urn:schemas-microsoft-com:mac:vml" xmlns:p="http://schemas.openxmlformats.org/presentationml/2006/main" xmlns:c="http://schemas.openxmlformats.org/drawingml/2006/chart" xmlns:dgm="http://schemas.openxmlformats.org/drawingml/2006/diagram" xmlns:o="urn:schemas-microsoft-com:office:office" xmlns:v="urn:schemas-microsoft-com:vml" xmlns:pvml="urn:schemas-microsoft-com:office:powerpoint" xmlns:com="http://schemas.openxmlformats.org/drawingml/2006/compatibility" xmlns:p14="http://schemas.microsoft.com/office/powerpoint/2010/main" xmlns:p15="http://schemas.microsoft.com/office/powerpoint/2012/main" xmlns:ahyp="http://schemas.microsoft.com/office/drawing/2018/hyperlinkcolor">
   <p:cSld>
     <p:spTree>
@@ -10839,7 +10839,7 @@
 </p:sld>
 </file>
 
-<file path=ppt/slides/slide4.xml><?xml version="1.0" encoding="utf-8"?>
+<file path=ppt/slides/slide3.xml><?xml version="1.0" encoding="utf-8"?>
 <p:sld xmlns:a="http://schemas.openxmlformats.org/drawingml/2006/main" xmlns:r="http://schemas.openxmlformats.org/officeDocument/2006/relationships" xmlns:mc="http://schemas.openxmlformats.org/markup-compatibility/2006" xmlns:mv="urn:schemas-microsoft-com:mac:vml" xmlns:p="http://schemas.openxmlformats.org/presentationml/2006/main" xmlns:c="http://schemas.openxmlformats.org/drawingml/2006/chart" xmlns:dgm="http://schemas.openxmlformats.org/drawingml/2006/diagram" xmlns:o="urn:schemas-microsoft-com:office:office" xmlns:v="urn:schemas-microsoft-com:vml" xmlns:pvml="urn:schemas-microsoft-com:office:powerpoint" xmlns:com="http://schemas.openxmlformats.org/drawingml/2006/compatibility" xmlns:p14="http://schemas.microsoft.com/office/powerpoint/2010/main" xmlns:p15="http://schemas.microsoft.com/office/powerpoint/2012/main" xmlns:ahyp="http://schemas.microsoft.com/office/drawing/2018/hyperlinkcolor">
   <p:cSld>
     <p:spTree>
@@ -11051,14 +11051,14 @@
       </p:sp>
       <p:pic>
         <p:nvPicPr>
-          <p:cNvPr id="131" name="Google Shape;131;p16"/>
-          <p:cNvPicPr preferRelativeResize="0"/>
+          <p:cNvPr id="131" name="Picture 130" descr="country_distribution_pct.png"/>
+          <p:cNvPicPr>
+            <a:picLocks noChangeAspect="1"/>
+          </p:cNvPicPr>
           <p:nvPr/>
         </p:nvPicPr>
         <p:blipFill>
-          <a:blip r:embed="rId3">
-            <a:alphaModFix/>
-          </a:blip>
+          <a:blip r:embed="rId4"/>
           <a:stretch>
             <a:fillRect/>
           </a:stretch>
@@ -11071,10 +11071,6 @@
           <a:prstGeom prst="rect">
             <a:avLst/>
           </a:prstGeom>
-          <a:noFill/>
-          <a:ln>
-            <a:noFill/>
-          </a:ln>
         </p:spPr>
       </p:pic>
     </p:spTree>
@@ -11085,7 +11081,7 @@
 </p:sld>
 </file>
 
-<file path=ppt/slides/slide5.xml><?xml version="1.0" encoding="utf-8"?>
+<file path=ppt/slides/slide4.xml><?xml version="1.0" encoding="utf-8"?>
 <p:sld xmlns:a="http://schemas.openxmlformats.org/drawingml/2006/main" xmlns:r="http://schemas.openxmlformats.org/officeDocument/2006/relationships" xmlns:mc="http://schemas.openxmlformats.org/markup-compatibility/2006" xmlns:mv="urn:schemas-microsoft-com:mac:vml" xmlns:p="http://schemas.openxmlformats.org/presentationml/2006/main" xmlns:c="http://schemas.openxmlformats.org/drawingml/2006/chart" xmlns:dgm="http://schemas.openxmlformats.org/drawingml/2006/diagram" xmlns:o="urn:schemas-microsoft-com:office:office" xmlns:v="urn:schemas-microsoft-com:vml" xmlns:pvml="urn:schemas-microsoft-com:office:powerpoint" xmlns:com="http://schemas.openxmlformats.org/drawingml/2006/compatibility" xmlns:p14="http://schemas.microsoft.com/office/powerpoint/2010/main" xmlns:p15="http://schemas.microsoft.com/office/powerpoint/2012/main" xmlns:ahyp="http://schemas.microsoft.com/office/drawing/2018/hyperlinkcolor">
   <p:cSld>
     <p:spTree>
@@ -11718,7 +11714,7 @@
 </p:sld>
 </file>
 
-<file path=ppt/slides/slide6.xml><?xml version="1.0" encoding="utf-8"?>
+<file path=ppt/slides/slide5.xml><?xml version="1.0" encoding="utf-8"?>
 <p:sld xmlns:a="http://schemas.openxmlformats.org/drawingml/2006/main" xmlns:r="http://schemas.openxmlformats.org/officeDocument/2006/relationships" xmlns:mc="http://schemas.openxmlformats.org/markup-compatibility/2006" xmlns:mv="urn:schemas-microsoft-com:mac:vml" xmlns:p="http://schemas.openxmlformats.org/presentationml/2006/main" xmlns:c="http://schemas.openxmlformats.org/drawingml/2006/chart" xmlns:dgm="http://schemas.openxmlformats.org/drawingml/2006/diagram" xmlns:o="urn:schemas-microsoft-com:office:office" xmlns:v="urn:schemas-microsoft-com:vml" xmlns:pvml="urn:schemas-microsoft-com:office:powerpoint" xmlns:com="http://schemas.openxmlformats.org/drawingml/2006/compatibility" xmlns:p14="http://schemas.microsoft.com/office/powerpoint/2010/main" xmlns:p15="http://schemas.microsoft.com/office/powerpoint/2012/main" xmlns:ahyp="http://schemas.microsoft.com/office/drawing/2018/hyperlinkcolor">
   <p:cSld>
     <p:spTree>

--- a/presentation/AB_Test_Results.pptx
+++ b/presentation/AB_Test_Results.pptx
@@ -826,6 +826,105 @@
 </p:notes>
 </file>
 
+<file path=ppt/notesSlides/notesSlide2.xml><?xml version="1.0" encoding="utf-8"?>
+<p:notes xmlns:a="http://schemas.openxmlformats.org/drawingml/2006/main" xmlns:r="http://schemas.openxmlformats.org/officeDocument/2006/relationships" xmlns:mc="http://schemas.openxmlformats.org/markup-compatibility/2006" xmlns:mv="urn:schemas-microsoft-com:mac:vml" xmlns:p="http://schemas.openxmlformats.org/presentationml/2006/main" xmlns:c="http://schemas.openxmlformats.org/drawingml/2006/chart" xmlns:dgm="http://schemas.openxmlformats.org/drawingml/2006/diagram" xmlns:o="urn:schemas-microsoft-com:office:office" xmlns:v="urn:schemas-microsoft-com:vml" xmlns:pvml="urn:schemas-microsoft-com:office:powerpoint" xmlns:com="http://schemas.openxmlformats.org/drawingml/2006/compatibility" xmlns:p14="http://schemas.microsoft.com/office/powerpoint/2010/main" xmlns:p15="http://schemas.microsoft.com/office/powerpoint/2012/main" xmlns:ahyp="http://schemas.microsoft.com/office/drawing/2018/hyperlinkcolor" showMasterPhAnim="0" showMasterSp="0">
+  <p:cSld>
+    <p:spTree>
+      <p:nvGrpSpPr>
+        <p:cNvPr id="109" name="Shape 109"/>
+        <p:cNvGrpSpPr/>
+        <p:nvPr/>
+      </p:nvGrpSpPr>
+      <p:grpSpPr>
+        <a:xfrm>
+          <a:off x="0" y="0"/>
+          <a:ext cx="0" cy="0"/>
+          <a:chOff x="0" y="0"/>
+          <a:chExt cx="0" cy="0"/>
+        </a:xfrm>
+      </p:grpSpPr>
+      <p:sp>
+        <p:nvSpPr>
+          <p:cNvPr id="110" name="Google Shape;110;g61bdf1f55e_0_0:notes"/>
+          <p:cNvSpPr/>
+          <p:nvPr>
+            <p:ph idx="2" type="sldImg"/>
+          </p:nvPr>
+        </p:nvSpPr>
+        <p:spPr>
+          <a:xfrm>
+            <a:off x="381300" y="685800"/>
+            <a:ext cx="6096000" cy="3429000"/>
+          </a:xfrm>
+          <a:custGeom>
+            <a:rect b="b" l="l" r="r" t="t"/>
+            <a:pathLst>
+              <a:path extrusionOk="0" h="120000" w="120000">
+                <a:moveTo>
+                  <a:pt x="0" y="0"/>
+                </a:moveTo>
+                <a:lnTo>
+                  <a:pt x="120000" y="0"/>
+                </a:lnTo>
+                <a:lnTo>
+                  <a:pt x="120000" y="120000"/>
+                </a:lnTo>
+                <a:lnTo>
+                  <a:pt x="0" y="120000"/>
+                </a:lnTo>
+                <a:close/>
+              </a:path>
+            </a:pathLst>
+          </a:custGeom>
+        </p:spPr>
+      </p:sp>
+      <p:sp>
+        <p:nvSpPr>
+          <p:cNvPr id="111" name="Google Shape;111;g61bdf1f55e_0_0:notes"/>
+          <p:cNvSpPr txBox="1"/>
+          <p:nvPr>
+            <p:ph idx="1" type="body"/>
+          </p:nvPr>
+        </p:nvSpPr>
+        <p:spPr>
+          <a:xfrm>
+            <a:off x="685800" y="4343400"/>
+            <a:ext cx="5486400" cy="4114800"/>
+          </a:xfrm>
+          <a:prstGeom prst="rect">
+            <a:avLst/>
+          </a:prstGeom>
+        </p:spPr>
+        <p:txBody>
+          <a:bodyPr anchorCtr="0" anchor="t" bIns="91425" lIns="91425" spcFirstLastPara="1" rIns="91425" wrap="square" tIns="91425">
+            <a:noAutofit/>
+          </a:bodyPr>
+          <a:lstStyle/>
+          <a:p>
+            <a:pPr indent="0" lvl="0" marL="0" rtl="0" algn="l">
+              <a:spcBef>
+                <a:spcPts val="0"/>
+              </a:spcBef>
+              <a:spcAft>
+                <a:spcPts val="0"/>
+              </a:spcAft>
+              <a:buNone/>
+            </a:pPr>
+            <a:r>
+              <a:t/>
+            </a:r>
+            <a:endParaRPr/>
+          </a:p>
+        </p:txBody>
+      </p:sp>
+    </p:spTree>
+  </p:cSld>
+  <p:clrMapOvr>
+    <a:masterClrMapping/>
+  </p:clrMapOvr>
+</p:notes>
+</file>
+
 <file path=ppt/notesSlides/notesSlide3.xml><?xml version="1.0" encoding="utf-8"?>
 <p:notes xmlns:a="http://schemas.openxmlformats.org/drawingml/2006/main" xmlns:r="http://schemas.openxmlformats.org/officeDocument/2006/relationships" xmlns:mc="http://schemas.openxmlformats.org/markup-compatibility/2006" xmlns:mv="urn:schemas-microsoft-com:mac:vml" xmlns:p="http://schemas.openxmlformats.org/presentationml/2006/main" xmlns:c="http://schemas.openxmlformats.org/drawingml/2006/chart" xmlns:dgm="http://schemas.openxmlformats.org/drawingml/2006/diagram" xmlns:o="urn:schemas-microsoft-com:office:office" xmlns:v="urn:schemas-microsoft-com:vml" xmlns:pvml="urn:schemas-microsoft-com:office:powerpoint" xmlns:com="http://schemas.openxmlformats.org/drawingml/2006/compatibility" xmlns:p14="http://schemas.microsoft.com/office/powerpoint/2010/main" xmlns:p15="http://schemas.microsoft.com/office/powerpoint/2012/main" xmlns:ahyp="http://schemas.microsoft.com/office/drawing/2018/hyperlinkcolor" showMasterPhAnim="0" showMasterSp="0">
   <p:cSld>
@@ -1886,7 +1985,7 @@
                 <a:cs typeface="Open Sans"/>
                 <a:sym typeface="Open Sans"/>
               </a:rPr>
-              <a:t xml:space="preserve">© 2024 Udacity. </a:t>
+              <a:t>© 2024 Udacity. </a:t>
             </a:r>
             <a:endParaRPr sz="1000">
               <a:solidFill>
@@ -10456,7 +10555,7 @@
                 <a:cs typeface="Open Sans"/>
                 <a:sym typeface="Open Sans"/>
               </a:rPr>
-              <a:t xml:space="preserve">© 2024 Udacity. </a:t>
+              <a:t>© 2024 Udacity. </a:t>
             </a:r>
             <a:endParaRPr sz="1000">
               <a:solidFill>
@@ -10548,49 +10647,9 @@
           </a:bodyPr>
           <a:lstStyle/>
           <a:p>
-            <a:pPr indent="0" lvl="0" marL="0" marR="0" rtl="0" algn="l">
-              <a:lnSpc>
-                <a:spcPct val="131250"/>
-              </a:lnSpc>
-              <a:spcBef>
-                <a:spcPts val="0"/>
-              </a:spcBef>
-              <a:spcAft>
-                <a:spcPts val="0"/>
-              </a:spcAft>
-              <a:buClr>
-                <a:srgbClr val="9CBDD8"/>
-              </a:buClr>
-              <a:buFont typeface="Open Sans"/>
-              <a:buNone/>
-            </a:pPr>
             <a:r>
-              <a:rPr b="1" lang="en"/>
-              <a:t>Data Scientist: A/B Test Analysis Project</a:t>
+              <a:t>Data Scientist: Francesco Malagrino</a:t>
             </a:r>
-            <a:endParaRPr b="1"/>
-          </a:p>
-          <a:p>
-            <a:pPr indent="0" lvl="0" marL="0" marR="0" rtl="0" algn="l">
-              <a:lnSpc>
-                <a:spcPct val="131250"/>
-              </a:lnSpc>
-              <a:spcBef>
-                <a:spcPts val="0"/>
-              </a:spcBef>
-              <a:spcAft>
-                <a:spcPts val="0"/>
-              </a:spcAft>
-              <a:buClr>
-                <a:srgbClr val="9CBDD8"/>
-              </a:buClr>
-              <a:buFont typeface="Open Sans"/>
-              <a:buNone/>
-            </a:pPr>
-            <a:r>
-              <a:t/>
-            </a:r>
-            <a:endParaRPr sz="1000"/>
           </a:p>
         </p:txBody>
       </p:sp>
@@ -10603,6 +10662,527 @@
 </file>
 
 <file path=ppt/slides/slide2.xml><?xml version="1.0" encoding="utf-8"?>
+<p:sld xmlns:a="http://schemas.openxmlformats.org/drawingml/2006/main" xmlns:r="http://schemas.openxmlformats.org/officeDocument/2006/relationships" xmlns:mc="http://schemas.openxmlformats.org/markup-compatibility/2006" xmlns:mv="urn:schemas-microsoft-com:mac:vml" xmlns:p="http://schemas.openxmlformats.org/presentationml/2006/main" xmlns:c="http://schemas.openxmlformats.org/drawingml/2006/chart" xmlns:dgm="http://schemas.openxmlformats.org/drawingml/2006/diagram" xmlns:o="urn:schemas-microsoft-com:office:office" xmlns:v="urn:schemas-microsoft-com:vml" xmlns:pvml="urn:schemas-microsoft-com:office:powerpoint" xmlns:com="http://schemas.openxmlformats.org/drawingml/2006/compatibility" xmlns:p14="http://schemas.microsoft.com/office/powerpoint/2010/main" xmlns:p15="http://schemas.microsoft.com/office/powerpoint/2012/main" xmlns:ahyp="http://schemas.microsoft.com/office/drawing/2018/hyperlinkcolor">
+  <p:cSld>
+    <p:spTree>
+      <p:nvGrpSpPr>
+        <p:cNvPr id="112" name="Shape 112"/>
+        <p:cNvGrpSpPr/>
+        <p:nvPr/>
+      </p:nvGrpSpPr>
+      <p:grpSpPr>
+        <a:xfrm>
+          <a:off x="0" y="0"/>
+          <a:ext cx="0" cy="0"/>
+          <a:chOff x="0" y="0"/>
+          <a:chExt cx="0" cy="0"/>
+        </a:xfrm>
+      </p:grpSpPr>
+      <p:sp>
+        <p:nvSpPr>
+          <p:cNvPr id="113" name="Google Shape;113;p14"/>
+          <p:cNvSpPr txBox="1"/>
+          <p:nvPr>
+            <p:ph type="title"/>
+          </p:nvPr>
+        </p:nvSpPr>
+        <p:spPr>
+          <a:xfrm>
+            <a:off x="685800" y="307965"/>
+            <a:ext cx="16916400" cy="1509000"/>
+          </a:xfrm>
+          <a:prstGeom prst="rect">
+            <a:avLst/>
+          </a:prstGeom>
+        </p:spPr>
+        <p:txBody>
+          <a:bodyPr anchorCtr="0" anchor="ctr" bIns="0" lIns="0" spcFirstLastPara="1" rIns="0" wrap="square" tIns="0">
+            <a:noAutofit/>
+          </a:bodyPr>
+          <a:lstStyle/>
+          <a:p>
+            <a:pPr indent="0" lvl="0" marL="0" rtl="0" algn="l">
+              <a:spcBef>
+                <a:spcPts val="0"/>
+              </a:spcBef>
+              <a:spcAft>
+                <a:spcPts val="0"/>
+              </a:spcAft>
+              <a:buNone/>
+            </a:pPr>
+            <a:r>
+              <a:rPr lang="en" sz="6400"/>
+              <a:t>How to Use This Template</a:t>
+            </a:r>
+            <a:endParaRPr sz="6400"/>
+          </a:p>
+        </p:txBody>
+      </p:sp>
+      <p:sp>
+        <p:nvSpPr>
+          <p:cNvPr id="114" name="Google Shape;114;p14"/>
+          <p:cNvSpPr txBox="1"/>
+          <p:nvPr>
+            <p:ph idx="1" type="body"/>
+          </p:nvPr>
+        </p:nvSpPr>
+        <p:spPr>
+          <a:xfrm>
+            <a:off x="685850" y="1828800"/>
+            <a:ext cx="16393800" cy="6629400"/>
+          </a:xfrm>
+          <a:prstGeom prst="rect">
+            <a:avLst/>
+          </a:prstGeom>
+        </p:spPr>
+        <p:txBody>
+          <a:bodyPr anchorCtr="0" anchor="t" bIns="0" lIns="0" spcFirstLastPara="1" rIns="0" wrap="square" tIns="0">
+            <a:noAutofit/>
+          </a:bodyPr>
+          <a:lstStyle/>
+          <a:p>
+            <a:pPr indent="-647700" lvl="0" marL="914400" rtl="0" algn="l">
+              <a:lnSpc>
+                <a:spcPct val="115000"/>
+              </a:lnSpc>
+              <a:spcBef>
+                <a:spcPts val="0"/>
+              </a:spcBef>
+              <a:spcAft>
+                <a:spcPts val="0"/>
+              </a:spcAft>
+              <a:buClr>
+                <a:srgbClr val="2D3D4A"/>
+              </a:buClr>
+              <a:buSzPts val="3000"/>
+              <a:buChar char="●"/>
+            </a:pPr>
+            <a:r>
+              <a:rPr lang="en" sz="3000">
+                <a:solidFill>
+                  <a:srgbClr val="2D3D4A"/>
+                </a:solidFill>
+              </a:rPr>
+              <a:t>Make a copy of this slide deck.</a:t>
+            </a:r>
+            <a:endParaRPr sz="3000">
+              <a:solidFill>
+                <a:srgbClr val="2D3D4A"/>
+              </a:solidFill>
+            </a:endParaRPr>
+          </a:p>
+          <a:p>
+            <a:pPr indent="-647700" lvl="0" marL="914400" rtl="0" algn="l">
+              <a:lnSpc>
+                <a:spcPct val="115000"/>
+              </a:lnSpc>
+              <a:spcBef>
+                <a:spcPts val="0"/>
+              </a:spcBef>
+              <a:spcAft>
+                <a:spcPts val="0"/>
+              </a:spcAft>
+              <a:buClr>
+                <a:srgbClr val="2D3D4A"/>
+              </a:buClr>
+              <a:buSzPts val="3000"/>
+              <a:buChar char="●"/>
+            </a:pPr>
+            <a:r>
+              <a:rPr lang="en" sz="3000">
+                <a:solidFill>
+                  <a:srgbClr val="2D3D4A"/>
+                </a:solidFill>
+              </a:rPr>
+              <a:t>We have provided these slides as a guide to ensure that you submit all the required components to successfully complete your project. </a:t>
+            </a:r>
+            <a:endParaRPr sz="3000">
+              <a:solidFill>
+                <a:srgbClr val="2D3D4A"/>
+              </a:solidFill>
+            </a:endParaRPr>
+          </a:p>
+          <a:p>
+            <a:pPr indent="-647700" lvl="0" marL="914400" rtl="0" algn="l">
+              <a:lnSpc>
+                <a:spcPct val="115000"/>
+              </a:lnSpc>
+              <a:spcBef>
+                <a:spcPts val="0"/>
+              </a:spcBef>
+              <a:spcAft>
+                <a:spcPts val="0"/>
+              </a:spcAft>
+              <a:buClr>
+                <a:srgbClr val="2D3D4A"/>
+              </a:buClr>
+              <a:buSzPts val="3000"/>
+              <a:buChar char="●"/>
+            </a:pPr>
+            <a:r>
+              <a:rPr lang="en" sz="3000">
+                <a:solidFill>
+                  <a:srgbClr val="2D3D4A"/>
+                </a:solidFill>
+              </a:rPr>
+              <a:t>All red text should be replaced with the results of your analysis.</a:t>
+            </a:r>
+            <a:endParaRPr sz="3000">
+              <a:solidFill>
+                <a:srgbClr val="2D3D4A"/>
+              </a:solidFill>
+            </a:endParaRPr>
+          </a:p>
+          <a:p>
+            <a:pPr indent="-647700" lvl="0" marL="914400" rtl="0" algn="l">
+              <a:lnSpc>
+                <a:spcPct val="115000"/>
+              </a:lnSpc>
+              <a:spcBef>
+                <a:spcPts val="0"/>
+              </a:spcBef>
+              <a:spcAft>
+                <a:spcPts val="0"/>
+              </a:spcAft>
+              <a:buClr>
+                <a:srgbClr val="2D3D4A"/>
+              </a:buClr>
+              <a:buSzPts val="3000"/>
+              <a:buChar char="●"/>
+            </a:pPr>
+            <a:r>
+              <a:rPr lang="en" sz="3000">
+                <a:solidFill>
+                  <a:srgbClr val="2D3D4A"/>
+                </a:solidFill>
+              </a:rPr>
+              <a:t>When presenting your project, please only think of this as a guide. We encouraged you to use creative freedom when making changes as long as the required information is present. </a:t>
+            </a:r>
+            <a:endParaRPr sz="3000">
+              <a:solidFill>
+                <a:srgbClr val="2D3D4A"/>
+              </a:solidFill>
+            </a:endParaRPr>
+          </a:p>
+          <a:p>
+            <a:pPr indent="-647700" lvl="0" marL="914400" rtl="0" algn="l">
+              <a:lnSpc>
+                <a:spcPct val="115000"/>
+              </a:lnSpc>
+              <a:spcBef>
+                <a:spcPts val="0"/>
+              </a:spcBef>
+              <a:spcAft>
+                <a:spcPts val="0"/>
+              </a:spcAft>
+              <a:buClr>
+                <a:srgbClr val="2D3D4A"/>
+              </a:buClr>
+              <a:buSzPts val="3000"/>
+              <a:buChar char="●"/>
+            </a:pPr>
+            <a:r>
+              <a:rPr lang="en" sz="3000">
+                <a:solidFill>
+                  <a:srgbClr val="2D3D4A"/>
+                </a:solidFill>
+              </a:rPr>
+              <a:t>Don’t forget to delete this slide before you submit your project.</a:t>
+            </a:r>
+            <a:endParaRPr sz="3000">
+              <a:solidFill>
+                <a:srgbClr val="2D3D4A"/>
+              </a:solidFill>
+            </a:endParaRPr>
+          </a:p>
+          <a:p>
+            <a:pPr indent="0" lvl="0" marL="228600" rtl="0" algn="l">
+              <a:lnSpc>
+                <a:spcPct val="115000"/>
+              </a:lnSpc>
+              <a:spcBef>
+                <a:spcPts val="2000"/>
+              </a:spcBef>
+              <a:spcAft>
+                <a:spcPts val="2000"/>
+              </a:spcAft>
+              <a:buNone/>
+            </a:pPr>
+            <a:r>
+              <a:t/>
+            </a:r>
+            <a:endParaRPr sz="3000">
+              <a:solidFill>
+                <a:srgbClr val="000000"/>
+              </a:solidFill>
+            </a:endParaRPr>
+          </a:p>
+        </p:txBody>
+      </p:sp>
+      <p:sp>
+        <p:nvSpPr>
+          <p:cNvPr id="115" name="Google Shape;115;p14"/>
+          <p:cNvSpPr/>
+          <p:nvPr/>
+        </p:nvSpPr>
+        <p:spPr>
+          <a:xfrm flipH="1">
+            <a:off x="14646600" y="0"/>
+            <a:ext cx="3641400" cy="3247200"/>
+          </a:xfrm>
+          <a:prstGeom prst="diagStripe">
+            <a:avLst>
+              <a:gd fmla="val 52389" name="adj"/>
+            </a:avLst>
+          </a:prstGeom>
+          <a:solidFill>
+            <a:srgbClr val="CC0000"/>
+          </a:solidFill>
+          <a:ln cap="flat" cmpd="sng" w="9525">
+            <a:solidFill>
+              <a:srgbClr val="990000"/>
+            </a:solidFill>
+            <a:prstDash val="solid"/>
+            <a:round/>
+            <a:headEnd len="sm" w="sm" type="none"/>
+            <a:tailEnd len="sm" w="sm" type="none"/>
+          </a:ln>
+        </p:spPr>
+        <p:txBody>
+          <a:bodyPr anchorCtr="0" anchor="ctr" bIns="182850" lIns="182850" spcFirstLastPara="1" rIns="182850" wrap="square" tIns="182850">
+            <a:noAutofit/>
+          </a:bodyPr>
+          <a:lstStyle/>
+          <a:p>
+            <a:pPr indent="0" lvl="0" marL="0" marR="0" rtl="0" algn="l">
+              <a:lnSpc>
+                <a:spcPct val="100000"/>
+              </a:lnSpc>
+              <a:spcBef>
+                <a:spcPts val="0"/>
+              </a:spcBef>
+              <a:spcAft>
+                <a:spcPts val="0"/>
+              </a:spcAft>
+              <a:buClr>
+                <a:srgbClr val="000000"/>
+              </a:buClr>
+              <a:buSzPts val="2800"/>
+              <a:buFont typeface="Arial"/>
+              <a:buNone/>
+            </a:pPr>
+            <a:r>
+              <a:t/>
+            </a:r>
+            <a:endParaRPr b="0" i="0" sz="2800" u="none" cap="none" strike="noStrike">
+              <a:solidFill>
+                <a:srgbClr val="000000"/>
+              </a:solidFill>
+              <a:latin typeface="Arial"/>
+              <a:ea typeface="Arial"/>
+              <a:cs typeface="Arial"/>
+              <a:sym typeface="Arial"/>
+            </a:endParaRPr>
+          </a:p>
+        </p:txBody>
+      </p:sp>
+      <p:grpSp>
+        <p:nvGrpSpPr>
+          <p:cNvPr id="116" name="Google Shape;116;p14"/>
+          <p:cNvGrpSpPr/>
+          <p:nvPr/>
+        </p:nvGrpSpPr>
+        <p:grpSpPr>
+          <a:xfrm>
+            <a:off x="14646600" y="-496834"/>
+            <a:ext cx="4112283" cy="3744034"/>
+            <a:chOff x="7323300" y="-248417"/>
+            <a:chExt cx="2056141" cy="1872017"/>
+          </a:xfrm>
+        </p:grpSpPr>
+        <p:sp>
+          <p:nvSpPr>
+            <p:cNvPr id="117" name="Google Shape;117;p14"/>
+            <p:cNvSpPr/>
+            <p:nvPr/>
+          </p:nvSpPr>
+          <p:spPr>
+            <a:xfrm flipH="1">
+              <a:off x="7323300" y="0"/>
+              <a:ext cx="1820700" cy="1623600"/>
+            </a:xfrm>
+            <a:prstGeom prst="diagStripe">
+              <a:avLst>
+                <a:gd fmla="val 52389" name="adj"/>
+              </a:avLst>
+            </a:prstGeom>
+            <a:solidFill>
+              <a:srgbClr val="CC0000"/>
+            </a:solidFill>
+            <a:ln cap="flat" cmpd="sng" w="9525">
+              <a:solidFill>
+                <a:srgbClr val="990000"/>
+              </a:solidFill>
+              <a:prstDash val="solid"/>
+              <a:round/>
+              <a:headEnd len="sm" w="sm" type="none"/>
+              <a:tailEnd len="sm" w="sm" type="none"/>
+            </a:ln>
+          </p:spPr>
+          <p:txBody>
+            <a:bodyPr anchorCtr="0" anchor="ctr" bIns="182850" lIns="182850" spcFirstLastPara="1" rIns="182850" wrap="square" tIns="182850">
+              <a:noAutofit/>
+            </a:bodyPr>
+            <a:lstStyle/>
+            <a:p>
+              <a:pPr indent="0" lvl="0" marL="0" marR="0" rtl="0" algn="l">
+                <a:lnSpc>
+                  <a:spcPct val="100000"/>
+                </a:lnSpc>
+                <a:spcBef>
+                  <a:spcPts val="0"/>
+                </a:spcBef>
+                <a:spcAft>
+                  <a:spcPts val="0"/>
+                </a:spcAft>
+                <a:buClr>
+                  <a:srgbClr val="000000"/>
+                </a:buClr>
+                <a:buSzPts val="2800"/>
+                <a:buFont typeface="Arial"/>
+                <a:buNone/>
+              </a:pPr>
+              <a:r>
+                <a:t/>
+              </a:r>
+              <a:endParaRPr b="0" i="0" sz="2800" u="none" cap="none" strike="noStrike">
+                <a:solidFill>
+                  <a:srgbClr val="000000"/>
+                </a:solidFill>
+                <a:latin typeface="Arial"/>
+                <a:ea typeface="Arial"/>
+                <a:cs typeface="Arial"/>
+                <a:sym typeface="Arial"/>
+              </a:endParaRPr>
+            </a:p>
+          </p:txBody>
+        </p:sp>
+        <p:sp>
+          <p:nvSpPr>
+            <p:cNvPr id="118" name="Google Shape;118;p14"/>
+            <p:cNvSpPr txBox="1"/>
+            <p:nvPr/>
+          </p:nvSpPr>
+          <p:spPr>
+            <a:xfrm rot="2496869">
+              <a:off x="7526066" y="340302"/>
+              <a:ext cx="1946952" cy="458162"/>
+            </a:xfrm>
+            <a:prstGeom prst="rect">
+              <a:avLst/>
+            </a:prstGeom>
+            <a:noFill/>
+            <a:ln>
+              <a:noFill/>
+            </a:ln>
+          </p:spPr>
+          <p:txBody>
+            <a:bodyPr anchorCtr="0" anchor="t" bIns="182850" lIns="182850" spcFirstLastPara="1" rIns="182850" wrap="square" tIns="182850">
+              <a:noAutofit/>
+            </a:bodyPr>
+            <a:lstStyle/>
+            <a:p>
+              <a:pPr indent="0" lvl="0" marL="0" marR="0" rtl="0" algn="ctr">
+                <a:lnSpc>
+                  <a:spcPct val="100000"/>
+                </a:lnSpc>
+                <a:spcBef>
+                  <a:spcPts val="0"/>
+                </a:spcBef>
+                <a:spcAft>
+                  <a:spcPts val="0"/>
+                </a:spcAft>
+                <a:buClr>
+                  <a:srgbClr val="000000"/>
+                </a:buClr>
+                <a:buSzPts val="4400"/>
+                <a:buFont typeface="Arial"/>
+                <a:buNone/>
+              </a:pPr>
+              <a:r>
+                <a:rPr b="0" i="0" lang="en" sz="4400" u="none" cap="none" strike="noStrike">
+                  <a:solidFill>
+                    <a:srgbClr val="F3F3F3"/>
+                  </a:solidFill>
+                  <a:latin typeface="Open Sans"/>
+                  <a:ea typeface="Open Sans"/>
+                  <a:cs typeface="Open Sans"/>
+                  <a:sym typeface="Open Sans"/>
+                </a:rPr>
+                <a:t>REFERENCE</a:t>
+              </a:r>
+              <a:endParaRPr b="0" i="0" sz="4400" u="none" cap="none" strike="noStrike">
+                <a:solidFill>
+                  <a:srgbClr val="F3F3F3"/>
+                </a:solidFill>
+                <a:latin typeface="Open Sans"/>
+                <a:ea typeface="Open Sans"/>
+                <a:cs typeface="Open Sans"/>
+                <a:sym typeface="Open Sans"/>
+              </a:endParaRPr>
+            </a:p>
+            <a:p>
+              <a:pPr indent="0" lvl="0" marL="0" marR="0" rtl="0" algn="ctr">
+                <a:lnSpc>
+                  <a:spcPct val="100000"/>
+                </a:lnSpc>
+                <a:spcBef>
+                  <a:spcPts val="0"/>
+                </a:spcBef>
+                <a:spcAft>
+                  <a:spcPts val="0"/>
+                </a:spcAft>
+                <a:buClr>
+                  <a:srgbClr val="000000"/>
+                </a:buClr>
+                <a:buSzPts val="1800"/>
+                <a:buFont typeface="Arial"/>
+                <a:buNone/>
+              </a:pPr>
+              <a:r>
+                <a:rPr b="1" i="0" lang="en" sz="1800" u="none" cap="none" strike="noStrike">
+                  <a:solidFill>
+                    <a:srgbClr val="F3F3F3"/>
+                  </a:solidFill>
+                  <a:latin typeface="Open Sans"/>
+                  <a:ea typeface="Open Sans"/>
+                  <a:cs typeface="Open Sans"/>
+                  <a:sym typeface="Open Sans"/>
+                </a:rPr>
+                <a:t>REMOVE BEFORE SUBMITTING</a:t>
+              </a:r>
+              <a:endParaRPr b="1" i="0" sz="1800" u="none" cap="none" strike="noStrike">
+                <a:solidFill>
+                  <a:srgbClr val="F3F3F3"/>
+                </a:solidFill>
+                <a:latin typeface="Open Sans"/>
+                <a:ea typeface="Open Sans"/>
+                <a:cs typeface="Open Sans"/>
+                <a:sym typeface="Open Sans"/>
+              </a:endParaRPr>
+            </a:p>
+          </p:txBody>
+        </p:sp>
+      </p:grpSp>
+    </p:spTree>
+  </p:cSld>
+  <p:clrMapOvr>
+    <a:masterClrMapping/>
+  </p:clrMapOvr>
+</p:sld>
+</file>
+
+<file path=ppt/slides/slide3.xml><?xml version="1.0" encoding="utf-8"?>
 <p:sld xmlns:a="http://schemas.openxmlformats.org/drawingml/2006/main" xmlns:r="http://schemas.openxmlformats.org/officeDocument/2006/relationships" xmlns:mc="http://schemas.openxmlformats.org/markup-compatibility/2006" xmlns:mv="urn:schemas-microsoft-com:mac:vml" xmlns:p="http://schemas.openxmlformats.org/presentationml/2006/main" xmlns:c="http://schemas.openxmlformats.org/drawingml/2006/chart" xmlns:dgm="http://schemas.openxmlformats.org/drawingml/2006/diagram" xmlns:o="urn:schemas-microsoft-com:office:office" xmlns:v="urn:schemas-microsoft-com:vml" xmlns:pvml="urn:schemas-microsoft-com:office:powerpoint" xmlns:com="http://schemas.openxmlformats.org/drawingml/2006/compatibility" xmlns:p14="http://schemas.microsoft.com/office/powerpoint/2010/main" xmlns:p15="http://schemas.microsoft.com/office/powerpoint/2012/main" xmlns:ahyp="http://schemas.microsoft.com/office/drawing/2018/hyperlinkcolor">
   <p:cSld>
     <p:spTree>
@@ -10708,7 +11288,7 @@
                   <a:schemeClr val="accent1"/>
                 </a:solidFill>
               </a:rPr>
-              <a:t xml:space="preserve"> A/B test analysis</a:t>
+              <a:t> A/B test analysis</a:t>
             </a:r>
             <a:endParaRPr sz="3000">
               <a:solidFill>
@@ -10839,7 +11419,7 @@
 </p:sld>
 </file>
 
-<file path=ppt/slides/slide3.xml><?xml version="1.0" encoding="utf-8"?>
+<file path=ppt/slides/slide4.xml><?xml version="1.0" encoding="utf-8"?>
 <p:sld xmlns:a="http://schemas.openxmlformats.org/drawingml/2006/main" xmlns:r="http://schemas.openxmlformats.org/officeDocument/2006/relationships" xmlns:mc="http://schemas.openxmlformats.org/markup-compatibility/2006" xmlns:mv="urn:schemas-microsoft-com:mac:vml" xmlns:p="http://schemas.openxmlformats.org/presentationml/2006/main" xmlns:c="http://schemas.openxmlformats.org/drawingml/2006/chart" xmlns:dgm="http://schemas.openxmlformats.org/drawingml/2006/diagram" xmlns:o="urn:schemas-microsoft-com:office:office" xmlns:v="urn:schemas-microsoft-com:vml" xmlns:pvml="urn:schemas-microsoft-com:office:powerpoint" xmlns:com="http://schemas.openxmlformats.org/drawingml/2006/compatibility" xmlns:p14="http://schemas.microsoft.com/office/powerpoint/2010/main" xmlns:p15="http://schemas.microsoft.com/office/powerpoint/2012/main" xmlns:ahyp="http://schemas.microsoft.com/office/drawing/2018/hyperlinkcolor">
   <p:cSld>
     <p:spTree>
@@ -10919,133 +11499,20 @@
           </a:bodyPr>
           <a:lstStyle/>
           <a:p>
-            <a:pPr indent="0" lvl="0" marL="0" rtl="0" algn="l">
-              <a:lnSpc>
-                <a:spcPct val="100000"/>
-              </a:lnSpc>
-              <a:spcBef>
-                <a:spcPts val="1400"/>
-              </a:spcBef>
-              <a:spcAft>
-                <a:spcPts val="0"/>
-              </a:spcAft>
-              <a:buNone/>
-            </a:pPr>
             <a:r>
-              <a:rPr lang="en"/>
-              <a:t xml:space="preserve">Total Variant Visitors: </a:t>
+              <a:t>Total Variant Visitors: 35,211</a:t>
             </a:r>
-            <a:r>
-              <a:rPr lang="en">
-                <a:solidFill>
-                  <a:srgbClr val="065A82"/>
-                </a:solidFill>
-              </a:rPr>
-              <a:t>35,211</a:t>
-            </a:r>
-            <a:endParaRPr>
-              <a:solidFill>
-                <a:srgbClr val="FF0000"/>
-              </a:solidFill>
-            </a:endParaRPr>
           </a:p>
           <a:p>
-            <a:pPr indent="0" lvl="0" marL="0" rtl="0" algn="l">
-              <a:lnSpc>
-                <a:spcPct val="100000"/>
-              </a:lnSpc>
-              <a:spcBef>
-                <a:spcPts val="1400"/>
-              </a:spcBef>
-              <a:spcAft>
-                <a:spcPts val="0"/>
-              </a:spcAft>
-              <a:buNone/>
-            </a:pPr>
             <a:r>
-              <a:rPr lang="en"/>
-              <a:t xml:space="preserve">Total Control Participants: </a:t>
+              <a:t>Total Control Participants: 34,678</a:t>
             </a:r>
+          </a:p>
+          <a:p/>
+          <a:p>
             <a:r>
-              <a:rPr lang="en">
-                <a:solidFill>
-                  <a:srgbClr val="065A82"/>
-                </a:solidFill>
-              </a:rPr>
-              <a:t>34,678</a:t>
-            </a:r>
-            <a:endParaRPr>
-              <a:solidFill>
-                <a:srgbClr val="FF0000"/>
-              </a:solidFill>
-            </a:endParaRPr>
-          </a:p>
-          <a:p>
-            <a:pPr indent="0" lvl="0" marL="0" rtl="0" algn="l">
-              <a:lnSpc>
-                <a:spcPct val="100000"/>
-              </a:lnSpc>
-              <a:spcBef>
-                <a:spcPts val="1400"/>
-              </a:spcBef>
-              <a:spcAft>
-                <a:spcPts val="0"/>
-              </a:spcAft>
-              <a:buNone/>
-            </a:pPr>
-            <a:r>
-              <a:t/>
-            </a:r>
-            <a:endParaRPr/>
-          </a:p>
-          <a:p>
-            <a:pPr indent="0" lvl="0" marL="0" rtl="0" algn="l">
-              <a:lnSpc>
-                <a:spcPct val="100000"/>
-              </a:lnSpc>
-              <a:spcBef>
-                <a:spcPts val="1400"/>
-              </a:spcBef>
-              <a:spcAft>
-                <a:spcPts val="0"/>
-              </a:spcAft>
-              <a:buNone/>
-            </a:pPr>
-            <a:r>
-              <a:rPr lang="en">
-                <a:solidFill>
-                  <a:srgbClr val="065A82"/>
-                </a:solidFill>
-              </a:rPr>
               <a:t>Users from: US (69.9%), UK (25.1%), CA (5.0%)</a:t>
             </a:r>
-            <a:endParaRPr>
-              <a:solidFill>
-                <a:srgbClr val="FF0000"/>
-              </a:solidFill>
-            </a:endParaRPr>
-          </a:p>
-          <a:p>
-            <a:pPr indent="0" lvl="0" marL="228600" rtl="0" algn="l">
-              <a:lnSpc>
-                <a:spcPct val="115000"/>
-              </a:lnSpc>
-              <a:spcBef>
-                <a:spcPts val="1400"/>
-              </a:spcBef>
-              <a:spcAft>
-                <a:spcPts val="2000"/>
-              </a:spcAft>
-              <a:buNone/>
-            </a:pPr>
-            <a:r>
-              <a:t/>
-            </a:r>
-            <a:endParaRPr sz="3000">
-              <a:solidFill>
-                <a:srgbClr val="000000"/>
-              </a:solidFill>
-            </a:endParaRPr>
           </a:p>
         </p:txBody>
       </p:sp>
@@ -11081,7 +11548,7 @@
 </p:sld>
 </file>
 
-<file path=ppt/slides/slide4.xml><?xml version="1.0" encoding="utf-8"?>
+<file path=ppt/slides/slide5.xml><?xml version="1.0" encoding="utf-8"?>
 <p:sld xmlns:a="http://schemas.openxmlformats.org/drawingml/2006/main" xmlns:r="http://schemas.openxmlformats.org/officeDocument/2006/relationships" xmlns:mc="http://schemas.openxmlformats.org/markup-compatibility/2006" xmlns:mv="urn:schemas-microsoft-com:mac:vml" xmlns:p="http://schemas.openxmlformats.org/presentationml/2006/main" xmlns:c="http://schemas.openxmlformats.org/drawingml/2006/chart" xmlns:dgm="http://schemas.openxmlformats.org/drawingml/2006/diagram" xmlns:o="urn:schemas-microsoft-com:office:office" xmlns:v="urn:schemas-microsoft-com:vml" xmlns:pvml="urn:schemas-microsoft-com:office:powerpoint" xmlns:com="http://schemas.openxmlformats.org/drawingml/2006/compatibility" xmlns:p14="http://schemas.microsoft.com/office/powerpoint/2010/main" xmlns:p15="http://schemas.microsoft.com/office/powerpoint/2012/main" xmlns:ahyp="http://schemas.microsoft.com/office/drawing/2018/hyperlinkcolor">
   <p:cSld>
     <p:spTree>
@@ -11136,7 +11603,7 @@
             </a:r>
             <a:r>
               <a:rPr lang="en" sz="6400"/>
-              <a:t xml:space="preserve"> Rates</a:t>
+              <a:t> Rates</a:t>
             </a:r>
             <a:endParaRPr sz="6400"/>
           </a:p>
@@ -11165,61 +11632,9 @@
           </a:bodyPr>
           <a:lstStyle/>
           <a:p>
-            <a:pPr indent="0" lvl="0" marL="0" rtl="0" algn="l">
-              <a:lnSpc>
-                <a:spcPct val="100000"/>
-              </a:lnSpc>
-              <a:spcBef>
-                <a:spcPts val="1400"/>
-              </a:spcBef>
-              <a:spcAft>
-                <a:spcPts val="0"/>
-              </a:spcAft>
-              <a:buNone/>
-            </a:pPr>
             <a:r>
-              <a:rPr lang="en">
-                <a:solidFill>
-                  <a:schemeClr val="accent1"/>
-                </a:solidFill>
-              </a:rPr>
-              <a:t xml:space="preserve">Executive Summary: </a:t>
+              <a:t>Executive Summary: Treatment is associated with higher conversion rates than control overall and within each country. The treatment conversion rate is 15.53% versus 10.53% for control, and the treatment lift appears in the US, UK, and CA. Country-level conversion rates differ somewhat, but the treatment effect is consistently positive.</a:t>
             </a:r>
-            <a:r>
-              <a:rPr lang="en">
-                <a:solidFill>
-                  <a:srgbClr val="065A82"/>
-                </a:solidFill>
-              </a:rPr>
-              <a:t>The treatment page outperforms the control in all countries. Treatment conversion (15.53%) exceeds control (10.53%) by +5.01 pp. The US, UK, and CA all show significant lifts. Country differences are modest; the treatment effect is the dominant driver of conversion.</a:t>
-            </a:r>
-            <a:endParaRPr>
-              <a:solidFill>
-                <a:srgbClr val="065A82"/>
-              </a:solidFill>
-            </a:endParaRPr>
-          </a:p>
-          <a:p>
-            <a:pPr indent="0" lvl="0" marL="228600" rtl="0" algn="l">
-              <a:lnSpc>
-                <a:spcPct val="115000"/>
-              </a:lnSpc>
-              <a:spcBef>
-                <a:spcPts val="1400"/>
-              </a:spcBef>
-              <a:spcAft>
-                <a:spcPts val="2000"/>
-              </a:spcAft>
-              <a:buNone/>
-            </a:pPr>
-            <a:r>
-              <a:t/>
-            </a:r>
-            <a:endParaRPr sz="3000">
-              <a:solidFill>
-                <a:srgbClr val="000000"/>
-              </a:solidFill>
-            </a:endParaRPr>
           </a:p>
         </p:txBody>
       </p:sp>
@@ -11433,36 +11848,9 @@
                     <a:bodyPr/>
                     <a:lstStyle/>
                     <a:p>
-                      <a:pPr indent="0" lvl="0" marL="0" rtl="0" algn="l">
-                        <a:spcBef>
-                          <a:spcPts val="0"/>
-                        </a:spcBef>
-                        <a:spcAft>
-                          <a:spcPts val="0"/>
-                        </a:spcAft>
-                        <a:buNone/>
-                      </a:pPr>
                       <a:r>
-                        <a:rPr lang="en" sz="2800">
-                          <a:solidFill>
-                            <a:srgbClr val="065A82"/>
-                          </a:solidFill>
-                          <a:latin typeface="Open Sans"/>
-                          <a:ea typeface="Open Sans"/>
-                          <a:cs typeface="Open Sans"/>
-                          <a:sym typeface="Open Sans"/>
-                        </a:rPr>
                         <a:t>10.73%</a:t>
                       </a:r>
-                      <a:endParaRPr sz="2800">
-                        <a:solidFill>
-                          <a:srgbClr val="065A82"/>
-                        </a:solidFill>
-                        <a:latin typeface="Open Sans"/>
-                        <a:ea typeface="Open Sans"/>
-                        <a:cs typeface="Open Sans"/>
-                        <a:sym typeface="Open Sans"/>
-                      </a:endParaRPr>
                     </a:p>
                   </a:txBody>
                   <a:tcPr marT="91425" marB="91425" marR="91425" marL="91425" anchor="ctr"/>
@@ -11472,36 +11860,9 @@
                     <a:bodyPr/>
                     <a:lstStyle/>
                     <a:p>
-                      <a:pPr indent="0" lvl="0" marL="0" rtl="0" algn="l">
-                        <a:spcBef>
-                          <a:spcPts val="0"/>
-                        </a:spcBef>
-                        <a:spcAft>
-                          <a:spcPts val="0"/>
-                        </a:spcAft>
-                        <a:buNone/>
-                      </a:pPr>
                       <a:r>
-                        <a:rPr lang="en" sz="2800">
-                          <a:solidFill>
-                            <a:srgbClr val="065A82"/>
-                          </a:solidFill>
-                          <a:latin typeface="Open Sans"/>
-                          <a:ea typeface="Open Sans"/>
-                          <a:cs typeface="Open Sans"/>
-                          <a:sym typeface="Open Sans"/>
-                        </a:rPr>
                         <a:t>10.16%</a:t>
                       </a:r>
-                      <a:endParaRPr sz="2800">
-                        <a:solidFill>
-                          <a:srgbClr val="065A82"/>
-                        </a:solidFill>
-                        <a:latin typeface="Open Sans"/>
-                        <a:ea typeface="Open Sans"/>
-                        <a:cs typeface="Open Sans"/>
-                        <a:sym typeface="Open Sans"/>
-                      </a:endParaRPr>
                     </a:p>
                   </a:txBody>
                   <a:tcPr marT="91425" marB="91425" marR="91425" marL="91425" anchor="ctr"/>
@@ -11511,36 +11872,9 @@
                     <a:bodyPr/>
                     <a:lstStyle/>
                     <a:p>
-                      <a:pPr indent="0" lvl="0" marL="0" rtl="0" algn="l">
-                        <a:spcBef>
-                          <a:spcPts val="0"/>
-                        </a:spcBef>
-                        <a:spcAft>
-                          <a:spcPts val="0"/>
-                        </a:spcAft>
-                        <a:buNone/>
-                      </a:pPr>
                       <a:r>
-                        <a:rPr lang="en" sz="2800">
-                          <a:solidFill>
-                            <a:srgbClr val="065A82"/>
-                          </a:solidFill>
-                          <a:latin typeface="Open Sans"/>
-                          <a:ea typeface="Open Sans"/>
-                          <a:cs typeface="Open Sans"/>
-                          <a:sym typeface="Open Sans"/>
-                        </a:rPr>
                         <a:t>9.45%</a:t>
                       </a:r>
-                      <a:endParaRPr sz="2800">
-                        <a:solidFill>
-                          <a:srgbClr val="065A82"/>
-                        </a:solidFill>
-                        <a:latin typeface="Open Sans"/>
-                        <a:ea typeface="Open Sans"/>
-                        <a:cs typeface="Open Sans"/>
-                        <a:sym typeface="Open Sans"/>
-                      </a:endParaRPr>
                     </a:p>
                   </a:txBody>
                   <a:tcPr marT="91425" marB="91425" marR="91425" marL="91425" anchor="ctr"/>
@@ -11589,36 +11923,9 @@
                     <a:bodyPr/>
                     <a:lstStyle/>
                     <a:p>
-                      <a:pPr indent="0" lvl="0" marL="0" rtl="0" algn="l">
-                        <a:spcBef>
-                          <a:spcPts val="0"/>
-                        </a:spcBef>
-                        <a:spcAft>
-                          <a:spcPts val="0"/>
-                        </a:spcAft>
-                        <a:buNone/>
-                      </a:pPr>
                       <a:r>
-                        <a:rPr lang="en" sz="2800">
-                          <a:solidFill>
-                            <a:srgbClr val="065A82"/>
-                          </a:solidFill>
-                          <a:latin typeface="Open Sans"/>
-                          <a:ea typeface="Open Sans"/>
-                          <a:cs typeface="Open Sans"/>
-                          <a:sym typeface="Open Sans"/>
-                        </a:rPr>
                         <a:t>15.78%</a:t>
                       </a:r>
-                      <a:endParaRPr sz="2800">
-                        <a:solidFill>
-                          <a:srgbClr val="065A82"/>
-                        </a:solidFill>
-                        <a:latin typeface="Open Sans"/>
-                        <a:ea typeface="Open Sans"/>
-                        <a:cs typeface="Open Sans"/>
-                        <a:sym typeface="Open Sans"/>
-                      </a:endParaRPr>
                     </a:p>
                   </a:txBody>
                   <a:tcPr marT="91425" marB="91425" marR="91425" marL="91425" anchor="ctr"/>
@@ -11628,36 +11935,9 @@
                     <a:bodyPr/>
                     <a:lstStyle/>
                     <a:p>
-                      <a:pPr indent="0" lvl="0" marL="0" rtl="0" algn="l">
-                        <a:spcBef>
-                          <a:spcPts val="0"/>
-                        </a:spcBef>
-                        <a:spcAft>
-                          <a:spcPts val="0"/>
-                        </a:spcAft>
-                        <a:buNone/>
-                      </a:pPr>
                       <a:r>
-                        <a:rPr lang="en" sz="2800">
-                          <a:solidFill>
-                            <a:srgbClr val="065A82"/>
-                          </a:solidFill>
-                          <a:latin typeface="Open Sans"/>
-                          <a:ea typeface="Open Sans"/>
-                          <a:cs typeface="Open Sans"/>
-                          <a:sym typeface="Open Sans"/>
-                        </a:rPr>
                         <a:t>14.87%</a:t>
                       </a:r>
-                      <a:endParaRPr sz="2800">
-                        <a:solidFill>
-                          <a:srgbClr val="065A82"/>
-                        </a:solidFill>
-                        <a:latin typeface="Open Sans"/>
-                        <a:ea typeface="Open Sans"/>
-                        <a:cs typeface="Open Sans"/>
-                        <a:sym typeface="Open Sans"/>
-                      </a:endParaRPr>
                     </a:p>
                   </a:txBody>
                   <a:tcPr marT="91425" marB="91425" marR="91425" marL="91425" anchor="ctr"/>
@@ -11667,36 +11947,9 @@
                     <a:bodyPr/>
                     <a:lstStyle/>
                     <a:p>
-                      <a:pPr indent="0" lvl="0" marL="0" rtl="0" algn="l">
-                        <a:spcBef>
-                          <a:spcPts val="0"/>
-                        </a:spcBef>
-                        <a:spcAft>
-                          <a:spcPts val="0"/>
-                        </a:spcAft>
-                        <a:buNone/>
-                      </a:pPr>
                       <a:r>
-                        <a:rPr lang="en" sz="2800">
-                          <a:solidFill>
-                            <a:srgbClr val="065A82"/>
-                          </a:solidFill>
-                          <a:latin typeface="Open Sans"/>
-                          <a:ea typeface="Open Sans"/>
-                          <a:cs typeface="Open Sans"/>
-                          <a:sym typeface="Open Sans"/>
-                        </a:rPr>
                         <a:t>15.40%</a:t>
                       </a:r>
-                      <a:endParaRPr sz="2800">
-                        <a:solidFill>
-                          <a:srgbClr val="065A82"/>
-                        </a:solidFill>
-                        <a:latin typeface="Open Sans"/>
-                        <a:ea typeface="Open Sans"/>
-                        <a:cs typeface="Open Sans"/>
-                        <a:sym typeface="Open Sans"/>
-                      </a:endParaRPr>
                     </a:p>
                   </a:txBody>
                   <a:tcPr marT="91425" marB="91425" marR="91425" marL="91425" anchor="ctr"/>
@@ -11714,7 +11967,7 @@
 </p:sld>
 </file>
 
-<file path=ppt/slides/slide5.xml><?xml version="1.0" encoding="utf-8"?>
+<file path=ppt/slides/slide6.xml><?xml version="1.0" encoding="utf-8"?>
 <p:sld xmlns:a="http://schemas.openxmlformats.org/drawingml/2006/main" xmlns:r="http://schemas.openxmlformats.org/officeDocument/2006/relationships" xmlns:mc="http://schemas.openxmlformats.org/markup-compatibility/2006" xmlns:mv="urn:schemas-microsoft-com:mac:vml" xmlns:p="http://schemas.openxmlformats.org/presentationml/2006/main" xmlns:c="http://schemas.openxmlformats.org/drawingml/2006/chart" xmlns:dgm="http://schemas.openxmlformats.org/drawingml/2006/diagram" xmlns:o="urn:schemas-microsoft-com:office:office" xmlns:v="urn:schemas-microsoft-com:vml" xmlns:pvml="urn:schemas-microsoft-com:office:powerpoint" xmlns:com="http://schemas.openxmlformats.org/drawingml/2006/compatibility" xmlns:p14="http://schemas.microsoft.com/office/powerpoint/2010/main" xmlns:p15="http://schemas.microsoft.com/office/powerpoint/2012/main" xmlns:ahyp="http://schemas.microsoft.com/office/drawing/2018/hyperlinkcolor">
   <p:cSld>
     <p:spTree>
@@ -11794,256 +12047,34 @@
           </a:bodyPr>
           <a:lstStyle/>
           <a:p>
-            <a:pPr indent="-457200" lvl="0" marL="457200" rtl="0" algn="l">
-              <a:lnSpc>
-                <a:spcPct val="100000"/>
-              </a:lnSpc>
-              <a:spcBef>
-                <a:spcPts val="0"/>
-              </a:spcBef>
-              <a:spcAft>
-                <a:spcPts val="0"/>
-              </a:spcAft>
-              <a:buSzPts val="3600"/>
-              <a:buChar char="●"/>
-            </a:pPr>
             <a:r>
-              <a:rPr lang="en">
-                <a:solidFill>
-                  <a:srgbClr val="0B0B0B"/>
-                </a:solidFill>
-              </a:rPr>
-              <a:t xml:space="preserve">Treatment Conversion Rate: </a:t>
+              <a:t>Treatment Conversion Rate: 15.53%</a:t>
             </a:r>
-            <a:r>
-              <a:rPr lang="en">
-                <a:solidFill>
-                  <a:srgbClr val="065A82"/>
-                </a:solidFill>
-              </a:rPr>
-              <a:t>15.53%</a:t>
-            </a:r>
-            <a:endParaRPr>
-              <a:solidFill>
-                <a:srgbClr val="065A82"/>
-              </a:solidFill>
-            </a:endParaRPr>
           </a:p>
           <a:p>
-            <a:pPr indent="-457200" lvl="0" marL="457200" rtl="0" algn="l">
-              <a:lnSpc>
-                <a:spcPct val="100000"/>
-              </a:lnSpc>
-              <a:spcBef>
-                <a:spcPts val="0"/>
-              </a:spcBef>
-              <a:spcAft>
-                <a:spcPts val="0"/>
-              </a:spcAft>
-              <a:buSzPts val="3600"/>
-              <a:buChar char="●"/>
-            </a:pPr>
             <a:r>
-              <a:rPr lang="en">
-                <a:solidFill>
-                  <a:srgbClr val="0B0B0B"/>
-                </a:solidFill>
-              </a:rPr>
-              <a:t xml:space="preserve">Control Conversion Rate:​ </a:t>
+              <a:t>Control Conversion Rate:​ 10.53%</a:t>
             </a:r>
-            <a:r>
-              <a:rPr lang="en">
-                <a:solidFill>
-                  <a:srgbClr val="065A82"/>
-                </a:solidFill>
-              </a:rPr>
-              <a:t>10.53%</a:t>
-            </a:r>
-            <a:endParaRPr>
-              <a:solidFill>
-                <a:srgbClr val="065A82"/>
-              </a:solidFill>
-            </a:endParaRPr>
           </a:p>
           <a:p>
-            <a:pPr indent="-457200" lvl="0" marL="457200" rtl="0" algn="l">
-              <a:lnSpc>
-                <a:spcPct val="100000"/>
-              </a:lnSpc>
-              <a:spcBef>
-                <a:spcPts val="0"/>
-              </a:spcBef>
-              <a:spcAft>
-                <a:spcPts val="0"/>
-              </a:spcAft>
-              <a:buSzPts val="3600"/>
-              <a:buChar char="●"/>
-            </a:pPr>
             <a:r>
-              <a:rPr lang="en">
-                <a:solidFill>
-                  <a:srgbClr val="0B0B0B"/>
-                </a:solidFill>
-              </a:rPr>
-              <a:t xml:space="preserve">Delta in Treatment vs. Control Conversion Rate:​ </a:t>
+              <a:t>Delta in Treatment vs. Control Conversion Rate:​ +5.01 percentage points</a:t>
             </a:r>
-            <a:r>
-              <a:rPr lang="en">
-                <a:solidFill>
-                  <a:srgbClr val="065A82"/>
-                </a:solidFill>
-              </a:rPr>
-              <a:t>+5.01 percentage points</a:t>
-            </a:r>
-            <a:endParaRPr>
-              <a:solidFill>
-                <a:srgbClr val="065A82"/>
-              </a:solidFill>
-            </a:endParaRPr>
           </a:p>
           <a:p>
-            <a:pPr indent="-457200" lvl="0" marL="457200" rtl="0" algn="l">
-              <a:lnSpc>
-                <a:spcPct val="100000"/>
-              </a:lnSpc>
-              <a:spcBef>
-                <a:spcPts val="0"/>
-              </a:spcBef>
-              <a:spcAft>
-                <a:spcPts val="0"/>
-              </a:spcAft>
-              <a:buSzPts val="3600"/>
-              <a:buChar char="●"/>
-            </a:pPr>
             <a:r>
-              <a:rPr lang="en">
-                <a:solidFill>
-                  <a:srgbClr val="0B0B0B"/>
-                </a:solidFill>
-              </a:rPr>
-              <a:t xml:space="preserve">p-value:​ </a:t>
+              <a:t>p-value:​ 0.00 (simulation-based; 0 of 500 null differences exceeded observed)</a:t>
             </a:r>
-            <a:r>
-              <a:rPr lang="en">
-                <a:solidFill>
-                  <a:srgbClr val="065A82"/>
-                </a:solidFill>
-              </a:rPr>
-              <a:t>&lt; 0.0001 (z = 19.65)</a:t>
-            </a:r>
-            <a:endParaRPr>
-              <a:solidFill>
-                <a:srgbClr val="065A82"/>
-              </a:solidFill>
-            </a:endParaRPr>
           </a:p>
           <a:p>
-            <a:pPr indent="-457200" lvl="0" marL="457200" rtl="0" algn="l">
-              <a:lnSpc>
-                <a:spcPct val="100000"/>
-              </a:lnSpc>
-              <a:spcBef>
-                <a:spcPts val="0"/>
-              </a:spcBef>
-              <a:spcAft>
-                <a:spcPts val="0"/>
-              </a:spcAft>
-              <a:buSzPts val="3600"/>
-              <a:buChar char="●"/>
-            </a:pPr>
             <a:r>
-              <a:rPr lang="en">
-                <a:solidFill>
-                  <a:srgbClr val="0B0B0B"/>
-                </a:solidFill>
-              </a:rPr>
               <a:t>Conclusion:</a:t>
             </a:r>
-            <a:endParaRPr>
-              <a:solidFill>
-                <a:srgbClr val="0B0B0B"/>
-              </a:solidFill>
-            </a:endParaRPr>
           </a:p>
           <a:p>
-            <a:pPr indent="-419100" lvl="1" marL="914400" rtl="0" algn="l">
-              <a:lnSpc>
-                <a:spcPct val="100000"/>
-              </a:lnSpc>
-              <a:spcBef>
-                <a:spcPts val="0"/>
-              </a:spcBef>
-              <a:spcAft>
-                <a:spcPts val="0"/>
-              </a:spcAft>
-              <a:buSzPts val="3000"/>
-              <a:buChar char="○"/>
-            </a:pPr>
             <a:r>
-              <a:rPr lang="en">
-                <a:solidFill>
-                  <a:srgbClr val="0B0B0B"/>
-                </a:solidFill>
-              </a:rPr>
-              <a:t>​</a:t>
+              <a:t>​We reject H0 at the 0.05 level. The treatment page performs significantly better than the control page, so the company should implement the new page.</a:t>
             </a:r>
-            <a:r>
-              <a:rPr lang="en">
-                <a:solidFill>
-                  <a:srgbClr val="065A82"/>
-                </a:solidFill>
-              </a:rPr>
-              <a:t>We reject H0 with very high confidence (z = 19.65, p &lt; 0.0001). The new page is statistically significantly better. The treatment page should be adopted — it delivers a +5.01 pp lift in conversions, confirmed across all three countries (US, UK, CA) and validated by both z-test and chi-squared test.</a:t>
-            </a:r>
-            <a:endParaRPr>
-              <a:solidFill>
-                <a:srgbClr val="065A82"/>
-              </a:solidFill>
-            </a:endParaRPr>
-          </a:p>
-          <a:p>
-            <a:pPr indent="0" lvl="0" marL="0" rtl="0" algn="l">
-              <a:lnSpc>
-                <a:spcPct val="100000"/>
-              </a:lnSpc>
-              <a:spcBef>
-                <a:spcPts val="0"/>
-              </a:spcBef>
-              <a:spcAft>
-                <a:spcPts val="0"/>
-              </a:spcAft>
-              <a:buNone/>
-            </a:pPr>
-            <a:r>
-              <a:t/>
-            </a:r>
-            <a:endParaRPr>
-              <a:solidFill>
-                <a:srgbClr val="0B0B0B"/>
-              </a:solidFill>
-            </a:endParaRPr>
-          </a:p>
-          <a:p>
-            <a:pPr indent="0" lvl="0" marL="228600" rtl="0" algn="l">
-              <a:lnSpc>
-                <a:spcPct val="115000"/>
-              </a:lnSpc>
-              <a:spcBef>
-                <a:spcPts val="1400"/>
-              </a:spcBef>
-              <a:spcAft>
-                <a:spcPts val="2000"/>
-              </a:spcAft>
-              <a:buNone/>
-            </a:pPr>
-            <a:r>
-              <a:t/>
-            </a:r>
-            <a:endParaRPr sz="3000">
-              <a:solidFill>
-                <a:srgbClr val="0B0B0B"/>
-              </a:solidFill>
-            </a:endParaRPr>
           </a:p>
         </p:txBody>
       </p:sp>
